--- a/docs/presentaciones/classes/clase-102-keras-sequential-api-presentacion.pptx
+++ b/docs/presentaciones/classes/clase-102-keras-sequential-api-presentacion.pptx
@@ -4910,7 +4910,387 @@
                 </a:solidFill>
                 <a:latin typeface="Courier New"/>
               </a:rPr>
-              <a:t># Imports y configuración inicial</a:t>
+              <a:t>import numpy as np</a:t>
+            </a:r>
+          </a:p>
+          <a:p>
+            <a:pPr>
+              <a:defRPr sz="1200" b="0">
+                <a:solidFill>
+                  <a:srgbClr val="F8FAFC"/>
+                </a:solidFill>
+                <a:latin typeface="Courier New"/>
+              </a:defRPr>
+            </a:pPr>
+            <a:r>
+              <a:rPr sz="1200" b="0">
+                <a:solidFill>
+                  <a:srgbClr val="F8FAFC"/>
+                </a:solidFill>
+                <a:latin typeface="Courier New"/>
+              </a:rPr>
+              <a:t>from tensorflow import keras</a:t>
+            </a:r>
+          </a:p>
+          <a:p>
+            <a:pPr>
+              <a:defRPr sz="1200" b="0">
+                <a:solidFill>
+                  <a:srgbClr val="F8FAFC"/>
+                </a:solidFill>
+                <a:latin typeface="Courier New"/>
+              </a:defRPr>
+            </a:pPr>
+            <a:r>
+              <a:rPr sz="1200" b="0">
+                <a:solidFill>
+                  <a:srgbClr val="F8FAFC"/>
+                </a:solidFill>
+                <a:latin typeface="Courier New"/>
+              </a:rPr>
+              <a:t>from tensorflow.keras import layers</a:t>
+            </a:r>
+          </a:p>
+          <a:p>
+            <a:pPr>
+              <a:defRPr sz="1200" b="0">
+                <a:solidFill>
+                  <a:srgbClr val="F8FAFC"/>
+                </a:solidFill>
+                <a:latin typeface="Courier New"/>
+              </a:defRPr>
+            </a:pPr>
+            <a:r>
+              <a:rPr sz="1200" b="0">
+                <a:solidFill>
+                  <a:srgbClr val="F8FAFC"/>
+                </a:solidFill>
+                <a:latin typeface="Courier New"/>
+              </a:rPr>
+              <a:t>keras.utils.set_random_seed(42)</a:t>
+            </a:r>
+          </a:p>
+          <a:p>
+            <a:pPr>
+              <a:defRPr sz="1200" b="0">
+                <a:solidFill>
+                  <a:srgbClr val="F8FAFC"/>
+                </a:solidFill>
+                <a:latin typeface="Courier New"/>
+              </a:defRPr>
+            </a:pPr>
+            <a:r>
+              <a:rPr sz="1200" b="0">
+                <a:solidFill>
+                  <a:srgbClr val="F8FAFC"/>
+                </a:solidFill>
+                <a:latin typeface="Courier New"/>
+              </a:rPr>
+              <a:t> </a:t>
+            </a:r>
+          </a:p>
+          <a:p>
+            <a:pPr>
+              <a:defRPr sz="1200" b="0">
+                <a:solidFill>
+                  <a:srgbClr val="F8FAFC"/>
+                </a:solidFill>
+                <a:latin typeface="Courier New"/>
+              </a:defRPr>
+            </a:pPr>
+            <a:r>
+              <a:rPr sz="1200" b="0">
+                <a:solidFill>
+                  <a:srgbClr val="F8FAFC"/>
+                </a:solidFill>
+                <a:latin typeface="Courier New"/>
+              </a:rPr>
+              <a:t># (a) lista en el constructor</a:t>
+            </a:r>
+          </a:p>
+          <a:p>
+            <a:pPr>
+              <a:defRPr sz="1200" b="0">
+                <a:solidFill>
+                  <a:srgbClr val="F8FAFC"/>
+                </a:solidFill>
+                <a:latin typeface="Courier New"/>
+              </a:defRPr>
+            </a:pPr>
+            <a:r>
+              <a:rPr sz="1200" b="0">
+                <a:solidFill>
+                  <a:srgbClr val="F8FAFC"/>
+                </a:solidFill>
+                <a:latin typeface="Courier New"/>
+              </a:rPr>
+              <a:t>modelo_a = keras.Sequential([</a:t>
+            </a:r>
+          </a:p>
+          <a:p>
+            <a:pPr>
+              <a:defRPr sz="1200" b="0">
+                <a:solidFill>
+                  <a:srgbClr val="F8FAFC"/>
+                </a:solidFill>
+                <a:latin typeface="Courier New"/>
+              </a:defRPr>
+            </a:pPr>
+            <a:r>
+              <a:rPr sz="1200" b="0">
+                <a:solidFill>
+                  <a:srgbClr val="F8FAFC"/>
+                </a:solidFill>
+                <a:latin typeface="Courier New"/>
+              </a:rPr>
+              <a:t>    keras.Input(shape=(784,)),</a:t>
+            </a:r>
+          </a:p>
+          <a:p>
+            <a:pPr>
+              <a:defRPr sz="1200" b="0">
+                <a:solidFill>
+                  <a:srgbClr val="F8FAFC"/>
+                </a:solidFill>
+                <a:latin typeface="Courier New"/>
+              </a:defRPr>
+            </a:pPr>
+            <a:r>
+              <a:rPr sz="1200" b="0">
+                <a:solidFill>
+                  <a:srgbClr val="F8FAFC"/>
+                </a:solidFill>
+                <a:latin typeface="Courier New"/>
+              </a:rPr>
+              <a:t>    layers.Dense(128, activation="relu"),</a:t>
+            </a:r>
+          </a:p>
+          <a:p>
+            <a:pPr>
+              <a:defRPr sz="1200" b="0">
+                <a:solidFill>
+                  <a:srgbClr val="F8FAFC"/>
+                </a:solidFill>
+                <a:latin typeface="Courier New"/>
+              </a:defRPr>
+            </a:pPr>
+            <a:r>
+              <a:rPr sz="1200" b="0">
+                <a:solidFill>
+                  <a:srgbClr val="F8FAFC"/>
+                </a:solidFill>
+                <a:latin typeface="Courier New"/>
+              </a:rPr>
+              <a:t>    layers.Dense(64, activation="relu"),</a:t>
+            </a:r>
+          </a:p>
+          <a:p>
+            <a:pPr>
+              <a:defRPr sz="1200" b="0">
+                <a:solidFill>
+                  <a:srgbClr val="F8FAFC"/>
+                </a:solidFill>
+                <a:latin typeface="Courier New"/>
+              </a:defRPr>
+            </a:pPr>
+            <a:r>
+              <a:rPr sz="1200" b="0">
+                <a:solidFill>
+                  <a:srgbClr val="F8FAFC"/>
+                </a:solidFill>
+                <a:latin typeface="Courier New"/>
+              </a:rPr>
+              <a:t>    layers.Dense(10, activation="softmax"),</a:t>
+            </a:r>
+          </a:p>
+          <a:p>
+            <a:pPr>
+              <a:defRPr sz="1200" b="0">
+                <a:solidFill>
+                  <a:srgbClr val="F8FAFC"/>
+                </a:solidFill>
+                <a:latin typeface="Courier New"/>
+              </a:defRPr>
+            </a:pPr>
+            <a:r>
+              <a:rPr sz="1200" b="0">
+                <a:solidFill>
+                  <a:srgbClr val="F8FAFC"/>
+                </a:solidFill>
+                <a:latin typeface="Courier New"/>
+              </a:rPr>
+              <a:t>])</a:t>
+            </a:r>
+          </a:p>
+          <a:p>
+            <a:pPr>
+              <a:defRPr sz="1200" b="0">
+                <a:solidFill>
+                  <a:srgbClr val="F8FAFC"/>
+                </a:solidFill>
+                <a:latin typeface="Courier New"/>
+              </a:defRPr>
+            </a:pPr>
+            <a:r>
+              <a:rPr sz="1200" b="0">
+                <a:solidFill>
+                  <a:srgbClr val="F8FAFC"/>
+                </a:solidFill>
+                <a:latin typeface="Courier New"/>
+              </a:rPr>
+              <a:t> </a:t>
+            </a:r>
+          </a:p>
+          <a:p>
+            <a:pPr>
+              <a:defRPr sz="1200" b="0">
+                <a:solidFill>
+                  <a:srgbClr val="F8FAFC"/>
+                </a:solidFill>
+                <a:latin typeface="Courier New"/>
+              </a:defRPr>
+            </a:pPr>
+            <a:r>
+              <a:rPr sz="1200" b="0">
+                <a:solidFill>
+                  <a:srgbClr val="F8FAFC"/>
+                </a:solidFill>
+                <a:latin typeface="Courier New"/>
+              </a:rPr>
+              <a:t># (b) incremental con .add()</a:t>
+            </a:r>
+          </a:p>
+          <a:p>
+            <a:pPr>
+              <a:defRPr sz="1200" b="0">
+                <a:solidFill>
+                  <a:srgbClr val="F8FAFC"/>
+                </a:solidFill>
+                <a:latin typeface="Courier New"/>
+              </a:defRPr>
+            </a:pPr>
+            <a:r>
+              <a:rPr sz="1200" b="0">
+                <a:solidFill>
+                  <a:srgbClr val="F8FAFC"/>
+                </a:solidFill>
+                <a:latin typeface="Courier New"/>
+              </a:rPr>
+              <a:t>modelo_b = keras.Sequential()</a:t>
+            </a:r>
+          </a:p>
+          <a:p>
+            <a:pPr>
+              <a:defRPr sz="1200" b="0">
+                <a:solidFill>
+                  <a:srgbClr val="F8FAFC"/>
+                </a:solidFill>
+                <a:latin typeface="Courier New"/>
+              </a:defRPr>
+            </a:pPr>
+            <a:r>
+              <a:rPr sz="1200" b="0">
+                <a:solidFill>
+                  <a:srgbClr val="F8FAFC"/>
+                </a:solidFill>
+                <a:latin typeface="Courier New"/>
+              </a:rPr>
+              <a:t>modelo_b.add(keras.Input(shape=(784,)))</a:t>
+            </a:r>
+          </a:p>
+          <a:p>
+            <a:pPr>
+              <a:defRPr sz="1200" b="0">
+                <a:solidFill>
+                  <a:srgbClr val="F8FAFC"/>
+                </a:solidFill>
+                <a:latin typeface="Courier New"/>
+              </a:defRPr>
+            </a:pPr>
+            <a:r>
+              <a:rPr sz="1200" b="0">
+                <a:solidFill>
+                  <a:srgbClr val="F8FAFC"/>
+                </a:solidFill>
+                <a:latin typeface="Courier New"/>
+              </a:rPr>
+              <a:t>modelo_b.add(layers.Dense(128, activation="relu"))</a:t>
+            </a:r>
+          </a:p>
+          <a:p>
+            <a:pPr>
+              <a:defRPr sz="1200" b="0">
+                <a:solidFill>
+                  <a:srgbClr val="F8FAFC"/>
+                </a:solidFill>
+                <a:latin typeface="Courier New"/>
+              </a:defRPr>
+            </a:pPr>
+            <a:r>
+              <a:rPr sz="1200" b="0">
+                <a:solidFill>
+                  <a:srgbClr val="F8FAFC"/>
+                </a:solidFill>
+                <a:latin typeface="Courier New"/>
+              </a:rPr>
+              <a:t>modelo_b.add(layers.Dense(64, activation="relu"))</a:t>
+            </a:r>
+          </a:p>
+          <a:p>
+            <a:pPr>
+              <a:defRPr sz="1200" b="0">
+                <a:solidFill>
+                  <a:srgbClr val="F8FAFC"/>
+                </a:solidFill>
+                <a:latin typeface="Courier New"/>
+              </a:defRPr>
+            </a:pPr>
+            <a:r>
+              <a:rPr sz="1200" b="0">
+                <a:solidFill>
+                  <a:srgbClr val="F8FAFC"/>
+                </a:solidFill>
+                <a:latin typeface="Courier New"/>
+              </a:rPr>
+              <a:t>modelo_b.add(layers.Dense(10, activation="softmax"))</a:t>
+            </a:r>
+          </a:p>
+          <a:p>
+            <a:pPr>
+              <a:defRPr sz="1200" b="0">
+                <a:solidFill>
+                  <a:srgbClr val="F8FAFC"/>
+                </a:solidFill>
+                <a:latin typeface="Courier New"/>
+              </a:defRPr>
+            </a:pPr>
+            <a:r>
+              <a:rPr sz="1200" b="0">
+                <a:solidFill>
+                  <a:srgbClr val="F8FAFC"/>
+                </a:solidFill>
+                <a:latin typeface="Courier New"/>
+              </a:rPr>
+              <a:t> </a:t>
+            </a:r>
+          </a:p>
+          <a:p>
+            <a:pPr>
+              <a:defRPr sz="1200" b="0">
+                <a:solidFill>
+                  <a:srgbClr val="F8FAFC"/>
+                </a:solidFill>
+                <a:latin typeface="Courier New"/>
+              </a:defRPr>
+            </a:pPr>
+            <a:r>
+              <a:rPr sz="1200" b="0">
+                <a:solidFill>
+                  <a:srgbClr val="F8FAFC"/>
+                </a:solidFill>
+                <a:latin typeface="Courier New"/>
+              </a:rPr>
+              <a:t># ... (truncado)</a:t>
             </a:r>
           </a:p>
         </p:txBody>

--- a/docs/presentaciones/classes/clase-102-keras-sequential-api-presentacion.pptx
+++ b/docs/presentaciones/classes/clase-102-keras-sequential-api-presentacion.pptx
@@ -3272,7 +3272,7 @@
                 </a:solidFill>
                 <a:latin typeface="Segoe UI"/>
               </a:rPr>
-              <a:t>Parte: 2 — Deep Learning · Fuente: Géron, cap. 10 § The Sequential API.  Duración estimada: 60 min.</a:t>
+              <a:t>Parte: 2 — Deep Learning · Fuente: Géron, cap. 10 § The Sequential API.  Duración estimada: 60 min. · Nivel: Avanzado</a:t>
             </a:r>
           </a:p>
         </p:txBody>
@@ -3362,7 +3362,7 @@
                 </a:solidFill>
                 <a:latin typeface="Segoe UI Semibold"/>
               </a:rPr>
-              <a:t>Dominar la **Sequential API** de Keras — la forma más simple y declarativa de construir un modelo cuando es una **pila lineal** de capas. Saber cuándo NO alcanza (cualquier topología con ramas, skip connections, multi-input/multi-output → Functional API, clase 093).</a:t>
+              <a:t>Dominar la **Sequential API** de Keras — la forma más simple y declarativa de construir un modelo cuando es una **pila lineal** de capas. Saber cuándo NO alcanza (cualquier topología con ramas, skip connections, multi-input/multi-output → Functional API, clase 103).</a:t>
             </a:r>
           </a:p>
           <a:p>
@@ -3581,7 +3581,7 @@
                 </a:solidFill>
                 <a:latin typeface="Segoe UI"/>
               </a:rPr>
-              <a:t>Parte: 2 — Deep Learning · Fuente: Géron, cap. 10 § The Sequential API.  Duración estimada: 60 min.</a:t>
+              <a:t>Parte: 2 — Deep Learning · Fuente: Géron, cap. 10 § The Sequential API.  Duración estimada: 60 min. · Nivel: Avanzado</a:t>
             </a:r>
           </a:p>
         </p:txBody>
@@ -3713,7 +3713,7 @@
                 </a:solidFill>
                 <a:latin typeface="Segoe UI"/>
               </a:rPr>
-              <a:t>• Dominar la Sequential API de Keras — la forma más simple y declarativa de construir un modelo cuando es una pila lineal de capas. Saber cuándo NO alcanza (cualquier topología con ramas, skip connections, multi-input/multi-output → Functional API, clase 093).</a:t>
+              <a:t>• Dominar la Sequential API de Keras — la forma más simple y declarativa de construir un modelo cuando es una pila lineal de capas. Saber cuándo NO alcanza (cualquier topología con ramas, skip connections, multi-input/multi-output → Functional API, clase 103).</a:t>
             </a:r>
           </a:p>
         </p:txBody>
